--- a/site/clases/parte-6-sistemas-de-recomendacion/222-librerias-lightfm-implicit-surprise/clase-222-librerias-lightfm-implicit-surprise-presentacion.pptx
+++ b/site/clases/parte-6-sistemas-de-recomendacion/222-librerias-lightfm-implicit-surprise/clase-222-librerias-lightfm-implicit-surprise-presentacion.pptx
@@ -3272,7 +3272,7 @@
                 </a:solidFill>
                 <a:latin typeface="Segoe UI"/>
               </a:rPr>
-              <a:t>Parte: 6 — Sistemas de Recomendación · Fuente: docs oficiales Surprise + LightFM + Implicit + TensorFlow Recommenders.  Duración estimada: 70 min.</a:t>
+              <a:t>Parte: 6 — Sistemas de Recomendación · Fuente: docs oficiales Surprise + LightFM + Implicit + TensorFlow Recommenders.  Duración estimada: 70 min. · Nivel: Intermedio-Avanzado</a:t>
             </a:r>
           </a:p>
         </p:txBody>
@@ -3581,7 +3581,7 @@
                 </a:solidFill>
                 <a:latin typeface="Segoe UI"/>
               </a:rPr>
-              <a:t>Parte: 6 — Sistemas de Recomendación · Fuente: docs oficiales Surprise + LightFM + Implicit + TensorFlow Recommenders.  Duración estimada: 70 min.</a:t>
+              <a:t>Parte: 6 — Sistemas de Recomendación · Fuente: docs oficiales Surprise + LightFM + Implicit + TensorFlow Recommenders.  Duración estimada: 70 min. · Nivel: Intermedio-Avanzado</a:t>
             </a:r>
           </a:p>
         </p:txBody>
@@ -6595,7 +6595,7 @@
                 </a:solidFill>
                 <a:latin typeface="Segoe UI Semibold"/>
               </a:rPr>
-              <a:t>Clase 223 — Sesgos algorítmicos: tipos y origen</a:t>
+              <a:t>Clase 223 — Tipos de sesgo algorítmico y orígenes</a:t>
             </a:r>
           </a:p>
         </p:txBody>
